--- a/yunqi-2026-agenda-201/docs/洞察一页-10-朗新：基于 Agent Sandbox 的云端 Agen.pptx
+++ b/yunqi-2026-agenda-201/docs/洞察一页-10-朗新：基于 Agent Sandbox 的云端 Agen.pptx
@@ -3141,7 +3141,7 @@
         <p:spPr>
           <a:xfrm>
             <a:off x="0" y="0"/>
-            <a:ext cx="12191695" cy="1051560"/>
+            <a:ext cx="12191695" cy="1097280"/>
           </a:xfrm>
           <a:prstGeom prst="rect">
             <a:avLst/>
@@ -3183,8 +3183,8 @@
         </p:nvSpPr>
         <p:spPr>
           <a:xfrm>
-            <a:off x="365760" y="146304"/>
-            <a:ext cx="11430000" cy="274320"/>
+            <a:off x="320040" y="91440"/>
+            <a:ext cx="11521440" cy="237744"/>
           </a:xfrm>
           <a:prstGeom prst="rect">
             <a:avLst/>
@@ -3199,7 +3199,7 @@
           <a:p>
             <a:pPr algn="l"/>
             <a:r>
-              <a:rPr sz="1300" b="0">
+              <a:rPr sz="1200" b="0">
                 <a:solidFill>
                   <a:srgbClr val="6B6B6B"/>
                 </a:solidFill>
@@ -3219,8 +3219,8 @@
         </p:nvSpPr>
         <p:spPr>
           <a:xfrm>
-            <a:off x="365760" y="420624"/>
-            <a:ext cx="11430000" cy="502920"/>
+            <a:off x="320040" y="347472"/>
+            <a:ext cx="11521440" cy="658368"/>
           </a:xfrm>
           <a:prstGeom prst="rect">
             <a:avLst/>
@@ -3235,14 +3235,14 @@
           <a:p>
             <a:pPr algn="l"/>
             <a:r>
-              <a:rPr sz="2000" b="1">
+              <a:rPr sz="1600" b="1">
                 <a:solidFill>
                   <a:srgbClr val="1A1A1A"/>
                 </a:solidFill>
                 <a:latin typeface="Microsoft YaHei"/>
                 <a:ea typeface="Microsoft YaHei"/>
               </a:rPr>
-              <a:t>洞察：数字分身平台 = Agent Sandbox 运行时 + 资产中台（知识/技能/MCP/记忆）…</a:t>
+              <a:t>洞察：数字分身平台 = Agent Sandbox 运行时 + 资产中台（知识/技能/MCP/记忆）+ 企业治理。</a:t>
             </a:r>
           </a:p>
         </p:txBody>
@@ -3255,8 +3255,8 @@
         </p:nvSpPr>
         <p:spPr>
           <a:xfrm>
-            <a:off x="320040" y="1207008"/>
-            <a:ext cx="11521440" cy="502920"/>
+            <a:off x="274320" y="1207008"/>
+            <a:ext cx="11612880" cy="749808"/>
           </a:xfrm>
           <a:prstGeom prst="rect">
             <a:avLst/>
@@ -3300,8 +3300,8 @@
         </p:nvSpPr>
         <p:spPr>
           <a:xfrm>
-            <a:off x="457200" y="1298448"/>
-            <a:ext cx="11247120" cy="365760"/>
+            <a:off x="411480" y="1261872"/>
+            <a:ext cx="11338560" cy="640080"/>
           </a:xfrm>
           <a:prstGeom prst="rect">
             <a:avLst/>
@@ -3316,14 +3316,14 @@
           <a:p>
             <a:pPr algn="l"/>
             <a:r>
-              <a:rPr sz="1300" b="1">
+              <a:rPr sz="1200" b="1">
                 <a:solidFill>
                   <a:srgbClr val="1A1A1A"/>
                 </a:solidFill>
                 <a:latin typeface="Microsoft YaHei"/>
                 <a:ea typeface="Microsoft YaHei"/>
               </a:rPr>
-              <a:t>一句话判断：张栋介绍朗新「九功数字分身」云端 Agent 平台：以 Agent Sandbox 为算力运行时，向上构建分身资产层（知识/技能/MCP/记忆）与执行层，并服务研发/运维/运营/业务等企业分身。强调从个人助手模式转向「…</a:t>
+              <a:t>一句话判断：张栋介绍朗新「九功数字分身」云端 Agent 平台：以 Agent Sandbox 为算力运行时，向上构建分身资产层（知识/技能/MCP/记忆）与执行层，并服务研发/运维/运营/业务等企业分身。</a:t>
             </a:r>
           </a:p>
         </p:txBody>
@@ -3336,8 +3336,8 @@
         </p:nvSpPr>
         <p:spPr>
           <a:xfrm>
-            <a:off x="320040" y="1874519"/>
-            <a:ext cx="3703320" cy="2606040"/>
+            <a:off x="274320" y="2084831"/>
+            <a:ext cx="3749039" cy="2267712"/>
           </a:xfrm>
           <a:prstGeom prst="rect">
             <a:avLst/>
@@ -3381,8 +3381,8 @@
         </p:nvSpPr>
         <p:spPr>
           <a:xfrm>
-            <a:off x="457200" y="2011679"/>
-            <a:ext cx="3429000" cy="320040"/>
+            <a:off x="402336" y="2176271"/>
+            <a:ext cx="3493007" cy="292608"/>
           </a:xfrm>
           <a:prstGeom prst="rect">
             <a:avLst/>
@@ -3397,14 +3397,14 @@
           <a:p>
             <a:pPr algn="l"/>
             <a:r>
-              <a:rPr sz="1500" b="1">
+              <a:rPr sz="1400" b="1">
                 <a:solidFill>
                   <a:srgbClr val="8B1A2B"/>
                 </a:solidFill>
                 <a:latin typeface="Microsoft YaHei"/>
                 <a:ea typeface="Microsoft YaHei"/>
               </a:rPr>
-              <a:t>01  朗新 AI 时代生产力：Age…</a:t>
+              <a:t>01  朗新 AI 时代生产力</a:t>
             </a:r>
           </a:p>
         </p:txBody>
@@ -3417,8 +3417,8 @@
         </p:nvSpPr>
         <p:spPr>
           <a:xfrm>
-            <a:off x="484632" y="2377439"/>
-            <a:ext cx="3374136" cy="1965960"/>
+            <a:off x="402336" y="2487167"/>
+            <a:ext cx="3493007" cy="1764792"/>
           </a:xfrm>
           <a:prstGeom prst="rect">
             <a:avLst/>
@@ -3433,28 +3433,45 @@
           <a:p>
             <a:pPr algn="l">
               <a:spcAft>
-                <a:spcPts val="400"/>
+                <a:spcPts val="200"/>
               </a:spcAft>
             </a:pPr>
             <a:r>
-              <a:rPr sz="1200" b="1">
+              <a:rPr sz="1100" b="1">
                 <a:solidFill>
                   <a:srgbClr val="1A1A1A"/>
                 </a:solidFill>
                 <a:latin typeface="Microsoft YaHei"/>
                 <a:ea typeface="Microsoft YaHei"/>
               </a:rPr>
-              <a:t>议题：朗新 AI 时代生产力——基于 Agent Sandbox 的云端 Agen…</a:t>
+              <a:t>HCS 可将「行业客户基于栈内 Agent Sandbox 构建数字分身平台」作为标杆场景，输出可复制的 AI4SE/企业分身参考架构</a:t>
             </a:r>
           </a:p>
           <a:p>
             <a:pPr algn="l">
               <a:spcAft>
-                <a:spcPts val="400"/>
+                <a:spcPts val="200"/>
               </a:spcAft>
             </a:pPr>
             <a:r>
-              <a:rPr sz="1200" b="0">
+              <a:rPr sz="1100" b="0">
+                <a:solidFill>
+                  <a:srgbClr val="4A4A4A"/>
+                </a:solidFill>
+                <a:latin typeface="Microsoft YaHei"/>
+                <a:ea typeface="Microsoft YaHei"/>
+              </a:rPr>
+              <a:t>• 议题：朗新 AI 时代生产力——基于 Agent Sandbox 的云端 Agent 平台。</a:t>
+            </a:r>
+          </a:p>
+          <a:p>
+            <a:pPr algn="l">
+              <a:spcAft>
+                <a:spcPts val="200"/>
+              </a:spcAft>
+            </a:pPr>
+            <a:r>
+              <a:rPr sz="1100" b="0">
                 <a:solidFill>
                   <a:srgbClr val="4A4A4A"/>
                 </a:solidFill>
@@ -3474,8 +3491,8 @@
         </p:nvSpPr>
         <p:spPr>
           <a:xfrm>
-            <a:off x="4224528" y="1874519"/>
-            <a:ext cx="3703320" cy="2606040"/>
+            <a:off x="4187951" y="2084831"/>
+            <a:ext cx="3749039" cy="2267712"/>
           </a:xfrm>
           <a:prstGeom prst="rect">
             <a:avLst/>
@@ -3519,8 +3536,8 @@
         </p:nvSpPr>
         <p:spPr>
           <a:xfrm>
-            <a:off x="4361688" y="2011679"/>
-            <a:ext cx="3429000" cy="320040"/>
+            <a:off x="4315967" y="2176271"/>
+            <a:ext cx="3493007" cy="292608"/>
           </a:xfrm>
           <a:prstGeom prst="rect">
             <a:avLst/>
@@ -3535,14 +3552,14 @@
           <a:p>
             <a:pPr algn="l"/>
             <a:r>
-              <a:rPr sz="1500" b="1">
+              <a:rPr sz="1400" b="1">
                 <a:solidFill>
                   <a:srgbClr val="8B1A2B"/>
                 </a:solidFill>
                 <a:latin typeface="Microsoft YaHei"/>
                 <a:ea typeface="Microsoft YaHei"/>
               </a:rPr>
-              <a:t>02  九功数字分身：重构 AI 时代…</a:t>
+              <a:t>02  重构 AI 时代生产关系</a:t>
             </a:r>
           </a:p>
         </p:txBody>
@@ -3555,8 +3572,8 @@
         </p:nvSpPr>
         <p:spPr>
           <a:xfrm>
-            <a:off x="4389120" y="2377439"/>
-            <a:ext cx="3374136" cy="1965960"/>
+            <a:off x="4315967" y="2487167"/>
+            <a:ext cx="3493007" cy="1764792"/>
           </a:xfrm>
           <a:prstGeom prst="rect">
             <a:avLst/>
@@ -3571,28 +3588,45 @@
           <a:p>
             <a:pPr algn="l">
               <a:spcAft>
-                <a:spcPts val="400"/>
+                <a:spcPts val="200"/>
               </a:spcAft>
             </a:pPr>
             <a:r>
-              <a:rPr sz="1200" b="1">
+              <a:rPr sz="1100" b="1">
                 <a:solidFill>
                   <a:srgbClr val="1A1A1A"/>
                 </a:solidFill>
                 <a:latin typeface="Microsoft YaHei"/>
                 <a:ea typeface="Microsoft YaHei"/>
               </a:rPr>
-              <a:t>传统模式：以人为中心，职能分工、层级管理，受知识/经验与时间注意力边界约束。</a:t>
+              <a:t>平台设计要从「人用工具」升级为「人监督分身」：HCS Agent 平台需内建审批、审计、结果验证与职责分离，匹配企业治理，而不是无限自治。</a:t>
             </a:r>
           </a:p>
           <a:p>
             <a:pPr algn="l">
               <a:spcAft>
-                <a:spcPts val="400"/>
+                <a:spcPts val="200"/>
               </a:spcAft>
             </a:pPr>
             <a:r>
-              <a:rPr sz="1200" b="0">
+              <a:rPr sz="1100" b="0">
+                <a:solidFill>
+                  <a:srgbClr val="4A4A4A"/>
+                </a:solidFill>
+                <a:latin typeface="Microsoft YaHei"/>
+                <a:ea typeface="Microsoft YaHei"/>
+              </a:rPr>
+              <a:t>• 传统模式：以人为中心，职能分工、层级管理，受知识/经验与时间注意力边界约束。</a:t>
+            </a:r>
+          </a:p>
+          <a:p>
+            <a:pPr algn="l">
+              <a:spcAft>
+                <a:spcPts val="200"/>
+              </a:spcAft>
+            </a:pPr>
+            <a:r>
+              <a:rPr sz="1100" b="0">
                 <a:solidFill>
                   <a:srgbClr val="4A4A4A"/>
                 </a:solidFill>
@@ -3605,11 +3639,11 @@
           <a:p>
             <a:pPr algn="l">
               <a:spcAft>
-                <a:spcPts val="400"/>
+                <a:spcPts val="200"/>
               </a:spcAft>
             </a:pPr>
             <a:r>
-              <a:rPr sz="1200" b="0">
+              <a:rPr sz="1100" b="0">
                 <a:solidFill>
                   <a:srgbClr val="4A4A4A"/>
                 </a:solidFill>
@@ -3629,8 +3663,8 @@
         </p:nvSpPr>
         <p:spPr>
           <a:xfrm>
-            <a:off x="8129016" y="1874519"/>
-            <a:ext cx="3703320" cy="2606040"/>
+            <a:off x="8101582" y="2084831"/>
+            <a:ext cx="3749039" cy="2267712"/>
           </a:xfrm>
           <a:prstGeom prst="rect">
             <a:avLst/>
@@ -3674,8 +3708,8 @@
         </p:nvSpPr>
         <p:spPr>
           <a:xfrm>
-            <a:off x="8266176" y="2011679"/>
-            <a:ext cx="3429000" cy="320040"/>
+            <a:off x="8229598" y="2176271"/>
+            <a:ext cx="3493007" cy="292608"/>
           </a:xfrm>
           <a:prstGeom prst="rect">
             <a:avLst/>
@@ -3690,14 +3724,14 @@
           <a:p>
             <a:pPr algn="l"/>
             <a:r>
-              <a:rPr sz="1500" b="1">
+              <a:rPr sz="1400" b="1">
                 <a:solidFill>
                   <a:srgbClr val="8B1A2B"/>
                 </a:solidFill>
                 <a:latin typeface="Microsoft YaHei"/>
                 <a:ea typeface="Microsoft YaHei"/>
               </a:rPr>
-              <a:t>03  九功数字分身技术架构：Sand…</a:t>
+              <a:t>03  九功数字分身技术架构</a:t>
             </a:r>
           </a:p>
         </p:txBody>
@@ -3710,8 +3744,8 @@
         </p:nvSpPr>
         <p:spPr>
           <a:xfrm>
-            <a:off x="8293608" y="2377439"/>
-            <a:ext cx="3374136" cy="1965960"/>
+            <a:off x="8229598" y="2487167"/>
+            <a:ext cx="3493007" cy="1764792"/>
           </a:xfrm>
           <a:prstGeom prst="rect">
             <a:avLst/>
@@ -3726,28 +3760,45 @@
           <a:p>
             <a:pPr algn="l">
               <a:spcAft>
-                <a:spcPts val="400"/>
+                <a:spcPts val="200"/>
               </a:spcAft>
             </a:pPr>
             <a:r>
-              <a:rPr sz="1200" b="1">
+              <a:rPr sz="1100" b="1">
                 <a:solidFill>
                   <a:srgbClr val="1A1A1A"/>
                 </a:solidFill>
                 <a:latin typeface="Microsoft YaHei"/>
                 <a:ea typeface="Microsoft YaHei"/>
               </a:rPr>
-              <a:t>底座 Agent Sandbox：计算/存储/网络，Kubernetes 原生生态。</a:t>
+              <a:t>对标架构应明确 Sandbox 运行时与「分身资产中台」分层</a:t>
             </a:r>
           </a:p>
           <a:p>
             <a:pPr algn="l">
               <a:spcAft>
-                <a:spcPts val="400"/>
+                <a:spcPts val="200"/>
               </a:spcAft>
             </a:pPr>
             <a:r>
-              <a:rPr sz="1200" b="0">
+              <a:rPr sz="1100" b="0">
+                <a:solidFill>
+                  <a:srgbClr val="4A4A4A"/>
+                </a:solidFill>
+                <a:latin typeface="Microsoft YaHei"/>
+                <a:ea typeface="Microsoft YaHei"/>
+              </a:rPr>
+              <a:t>• 底座 Agent Sandbox：计算/存储/网络，Kubernetes 原生生态。</a:t>
+            </a:r>
+          </a:p>
+          <a:p>
+            <a:pPr algn="l">
+              <a:spcAft>
+                <a:spcPts val="200"/>
+              </a:spcAft>
+            </a:pPr>
+            <a:r>
+              <a:rPr sz="1100" b="0">
                 <a:solidFill>
                   <a:srgbClr val="4A4A4A"/>
                 </a:solidFill>
@@ -3760,35 +3811,18 @@
           <a:p>
             <a:pPr algn="l">
               <a:spcAft>
-                <a:spcPts val="400"/>
+                <a:spcPts val="200"/>
               </a:spcAft>
             </a:pPr>
             <a:r>
-              <a:rPr sz="1200" b="0">
+              <a:rPr sz="1100" b="0">
                 <a:solidFill>
                   <a:srgbClr val="4A4A4A"/>
                 </a:solidFill>
                 <a:latin typeface="Microsoft YaHei"/>
                 <a:ea typeface="Microsoft YaHei"/>
               </a:rPr>
-              <a:t>• 分身资产层：Knowledge、Skill、MCP 链接、Memory；执行层任务→上下文→计划→分身→流程→技能→执行→结果→记忆。</a:t>
-            </a:r>
-          </a:p>
-          <a:p>
-            <a:pPr algn="l">
-              <a:spcAft>
-                <a:spcPts val="400"/>
-              </a:spcAft>
-            </a:pPr>
-            <a:r>
-              <a:rPr sz="1200" b="0">
-                <a:solidFill>
-                  <a:srgbClr val="4A4A4A"/>
-                </a:solidFill>
-                <a:latin typeface="Microsoft YaHei"/>
-                <a:ea typeface="Microsoft YaHei"/>
-              </a:rPr>
-              <a:t>• 企业应用：研发/运维/运营/业务分身；横切资产配置与安全治理（身份、隔离、审计、配额、合规）。</a:t>
+              <a:t>• 分身资产层：Knowledge、Skill、MCP 链接、Memory</a:t>
             </a:r>
           </a:p>
         </p:txBody>
@@ -3801,8 +3835,8 @@
         </p:nvSpPr>
         <p:spPr>
           <a:xfrm>
-            <a:off x="320040" y="4617720"/>
-            <a:ext cx="7315200" cy="256032"/>
+            <a:off x="274320" y="4553712"/>
+            <a:ext cx="7315200" cy="237744"/>
           </a:xfrm>
           <a:prstGeom prst="rect">
             <a:avLst/>
@@ -3817,7 +3851,7 @@
           <a:p>
             <a:pPr algn="l"/>
             <a:r>
-              <a:rPr sz="1400" b="1">
+              <a:rPr sz="1300" b="1">
                 <a:solidFill>
                   <a:srgbClr val="1A1A1A"/>
                 </a:solidFill>
@@ -3837,8 +3871,8 @@
         </p:nvSpPr>
         <p:spPr>
           <a:xfrm>
-            <a:off x="320040" y="4910328"/>
-            <a:ext cx="1847088" cy="868680"/>
+            <a:off x="274320" y="4809744"/>
+            <a:ext cx="1874519" cy="960120"/>
           </a:xfrm>
           <a:prstGeom prst="rect">
             <a:avLst/>
@@ -3882,8 +3916,8 @@
         </p:nvSpPr>
         <p:spPr>
           <a:xfrm>
-            <a:off x="429768" y="4965192"/>
-            <a:ext cx="1664208" cy="201168"/>
+            <a:off x="365760" y="4864608"/>
+            <a:ext cx="1709927" cy="201168"/>
           </a:xfrm>
           <a:prstGeom prst="rect">
             <a:avLst/>
@@ -3905,7 +3939,7 @@
                 <a:latin typeface="Microsoft YaHei"/>
                 <a:ea typeface="Microsoft YaHei"/>
               </a:rPr>
-              <a:t>朗新 AI 时代生产力…</a:t>
+              <a:t>产品定位</a:t>
             </a:r>
           </a:p>
         </p:txBody>
@@ -3918,8 +3952,8 @@
         </p:nvSpPr>
         <p:spPr>
           <a:xfrm>
-            <a:off x="429768" y="5166360"/>
-            <a:ext cx="1664208" cy="237744"/>
+            <a:off x="365760" y="5065776"/>
+            <a:ext cx="1709927" cy="256032"/>
           </a:xfrm>
           <a:prstGeom prst="rect">
             <a:avLst/>
@@ -3941,7 +3975,7 @@
                 <a:latin typeface="Microsoft YaHei"/>
                 <a:ea typeface="Microsoft YaHei"/>
               </a:rPr>
-              <a:t>议题：朗新 AI 时代生产力—…</a:t>
+              <a:t>演讲口径</a:t>
             </a:r>
           </a:p>
         </p:txBody>
@@ -3954,8 +3988,8 @@
         </p:nvSpPr>
         <p:spPr>
           <a:xfrm>
-            <a:off x="429768" y="5413248"/>
-            <a:ext cx="1664208" cy="292608"/>
+            <a:off x="365760" y="5340096"/>
+            <a:ext cx="1709927" cy="365760"/>
           </a:xfrm>
           <a:prstGeom prst="rect">
             <a:avLst/>
@@ -3970,14 +4004,14 @@
           <a:p>
             <a:pPr algn="l"/>
             <a:r>
-              <a:rPr sz="1400" b="1">
+              <a:rPr sz="1200" b="1">
                 <a:solidFill>
                   <a:srgbClr val="8B1A2B"/>
                 </a:solidFill>
                 <a:latin typeface="Microsoft YaHei"/>
                 <a:ea typeface="Microsoft YaHei"/>
               </a:rPr>
-              <a:t>产品定位：云端 Agent 平台 …</a:t>
+              <a:t>云端 Agent 平台 / Agent Sandbox</a:t>
             </a:r>
           </a:p>
         </p:txBody>
@@ -3990,8 +4024,8 @@
         </p:nvSpPr>
         <p:spPr>
           <a:xfrm>
-            <a:off x="2276856" y="4910328"/>
-            <a:ext cx="1847088" cy="868680"/>
+            <a:off x="2240279" y="4809744"/>
+            <a:ext cx="1874519" cy="960120"/>
           </a:xfrm>
           <a:prstGeom prst="rect">
             <a:avLst/>
@@ -4035,8 +4069,8 @@
         </p:nvSpPr>
         <p:spPr>
           <a:xfrm>
-            <a:off x="2386584" y="4965192"/>
-            <a:ext cx="1664208" cy="201168"/>
+            <a:off x="2331719" y="4864608"/>
+            <a:ext cx="1709927" cy="201168"/>
           </a:xfrm>
           <a:prstGeom prst="rect">
             <a:avLst/>
@@ -4058,7 +4092,7 @@
                 <a:latin typeface="Microsoft YaHei"/>
                 <a:ea typeface="Microsoft YaHei"/>
               </a:rPr>
-              <a:t>九功数字分身：重构 A…</a:t>
+              <a:t>人的四职责</a:t>
             </a:r>
           </a:p>
         </p:txBody>
@@ -4071,8 +4105,8 @@
         </p:nvSpPr>
         <p:spPr>
           <a:xfrm>
-            <a:off x="2386584" y="5166360"/>
-            <a:ext cx="1664208" cy="237744"/>
+            <a:off x="2331719" y="5065776"/>
+            <a:ext cx="1709927" cy="256032"/>
           </a:xfrm>
           <a:prstGeom prst="rect">
             <a:avLst/>
@@ -4094,7 +4128,7 @@
                 <a:latin typeface="Microsoft YaHei"/>
                 <a:ea typeface="Microsoft YaHei"/>
               </a:rPr>
-              <a:t>传统模式：以人为中心，职能分工…</a:t>
+              <a:t>演讲口径</a:t>
             </a:r>
           </a:p>
         </p:txBody>
@@ -4107,8 +4141,8 @@
         </p:nvSpPr>
         <p:spPr>
           <a:xfrm>
-            <a:off x="2386584" y="5413248"/>
-            <a:ext cx="1664208" cy="292608"/>
+            <a:off x="2331719" y="5340096"/>
+            <a:ext cx="1709927" cy="365760"/>
           </a:xfrm>
           <a:prstGeom prst="rect">
             <a:avLst/>
@@ -4123,14 +4157,14 @@
           <a:p>
             <a:pPr algn="l"/>
             <a:r>
-              <a:rPr sz="1400" b="1">
+              <a:rPr sz="1200" b="1">
                 <a:solidFill>
                   <a:srgbClr val="8B1A2B"/>
                 </a:solidFill>
                 <a:latin typeface="Microsoft YaHei"/>
                 <a:ea typeface="Microsoft YaHei"/>
               </a:rPr>
-              <a:t>人的四职责：规划 / 审查 / 验…</a:t>
+              <a:t>规划 / 审查 / 验证 / 决策</a:t>
             </a:r>
           </a:p>
         </p:txBody>
@@ -4143,8 +4177,8 @@
         </p:nvSpPr>
         <p:spPr>
           <a:xfrm>
-            <a:off x="4233672" y="4910328"/>
-            <a:ext cx="1847088" cy="868680"/>
+            <a:off x="4206238" y="4809744"/>
+            <a:ext cx="1874519" cy="960120"/>
           </a:xfrm>
           <a:prstGeom prst="rect">
             <a:avLst/>
@@ -4188,8 +4222,8 @@
         </p:nvSpPr>
         <p:spPr>
           <a:xfrm>
-            <a:off x="4343400" y="4965192"/>
-            <a:ext cx="1664208" cy="201168"/>
+            <a:off x="4297678" y="4864608"/>
+            <a:ext cx="1709927" cy="201168"/>
           </a:xfrm>
           <a:prstGeom prst="rect">
             <a:avLst/>
@@ -4211,7 +4245,7 @@
                 <a:latin typeface="Microsoft YaHei"/>
                 <a:ea typeface="Microsoft YaHei"/>
               </a:rPr>
-              <a:t>九功数字分身技术架构：…</a:t>
+              <a:t>资产四件套</a:t>
             </a:r>
           </a:p>
         </p:txBody>
@@ -4224,8 +4258,8 @@
         </p:nvSpPr>
         <p:spPr>
           <a:xfrm>
-            <a:off x="4343400" y="5166360"/>
-            <a:ext cx="1664208" cy="237744"/>
+            <a:off x="4297678" y="5065776"/>
+            <a:ext cx="1709927" cy="256032"/>
           </a:xfrm>
           <a:prstGeom prst="rect">
             <a:avLst/>
@@ -4247,7 +4281,7 @@
                 <a:latin typeface="Microsoft YaHei"/>
                 <a:ea typeface="Microsoft YaHei"/>
               </a:rPr>
-              <a:t>目标：更高研发效率 / 更好质…</a:t>
+              <a:t>演讲口径</a:t>
             </a:r>
           </a:p>
         </p:txBody>
@@ -4260,8 +4294,8 @@
         </p:nvSpPr>
         <p:spPr>
           <a:xfrm>
-            <a:off x="4343400" y="5413248"/>
-            <a:ext cx="1664208" cy="292608"/>
+            <a:off x="4297678" y="5340096"/>
+            <a:ext cx="1709927" cy="365760"/>
           </a:xfrm>
           <a:prstGeom prst="rect">
             <a:avLst/>
@@ -4276,14 +4310,14 @@
           <a:p>
             <a:pPr algn="l"/>
             <a:r>
-              <a:rPr sz="1400" b="1">
+              <a:rPr sz="1200" b="1">
                 <a:solidFill>
                   <a:srgbClr val="8B1A2B"/>
                 </a:solidFill>
                 <a:latin typeface="Microsoft YaHei"/>
                 <a:ea typeface="Microsoft YaHei"/>
               </a:rPr>
-              <a:t>目标：更高研发效率 / 更好质量 …</a:t>
+              <a:t>Knowledge / Skill / MCP / Memory</a:t>
             </a:r>
           </a:p>
         </p:txBody>
@@ -4296,8 +4330,8 @@
         </p:nvSpPr>
         <p:spPr>
           <a:xfrm>
-            <a:off x="6190488" y="4910328"/>
-            <a:ext cx="1847088" cy="868680"/>
+            <a:off x="6172197" y="4809744"/>
+            <a:ext cx="1874519" cy="960120"/>
           </a:xfrm>
           <a:prstGeom prst="rect">
             <a:avLst/>
@@ -4341,8 +4375,8 @@
         </p:nvSpPr>
         <p:spPr>
           <a:xfrm>
-            <a:off x="6300216" y="4965192"/>
-            <a:ext cx="1664208" cy="201168"/>
+            <a:off x="6263637" y="4864608"/>
+            <a:ext cx="1709927" cy="201168"/>
           </a:xfrm>
           <a:prstGeom prst="rect">
             <a:avLst/>
@@ -4364,7 +4398,7 @@
                 <a:latin typeface="Microsoft YaHei"/>
                 <a:ea typeface="Microsoft YaHei"/>
               </a:rPr>
-              <a:t>云端开发：贯通研发交付…</a:t>
+              <a:t>目标</a:t>
             </a:r>
           </a:p>
         </p:txBody>
@@ -4377,8 +4411,8 @@
         </p:nvSpPr>
         <p:spPr>
           <a:xfrm>
-            <a:off x="6300216" y="5166360"/>
-            <a:ext cx="1664208" cy="237744"/>
+            <a:off x="6263637" y="5065776"/>
+            <a:ext cx="1709927" cy="256032"/>
           </a:xfrm>
           <a:prstGeom prst="rect">
             <a:avLst/>
@@ -4400,7 +4434,7 @@
                 <a:latin typeface="Microsoft YaHei"/>
                 <a:ea typeface="Microsoft YaHei"/>
               </a:rPr>
-              <a:t>三支柱：流程编排（任务拆解→编…</a:t>
+              <a:t>演讲口径</a:t>
             </a:r>
           </a:p>
         </p:txBody>
@@ -4413,8 +4447,8 @@
         </p:nvSpPr>
         <p:spPr>
           <a:xfrm>
-            <a:off x="6300216" y="5413248"/>
-            <a:ext cx="1664208" cy="292608"/>
+            <a:off x="6263637" y="5340096"/>
+            <a:ext cx="1709927" cy="365760"/>
           </a:xfrm>
           <a:prstGeom prst="rect">
             <a:avLst/>
@@ -4429,14 +4463,14 @@
           <a:p>
             <a:pPr algn="l"/>
             <a:r>
-              <a:rPr sz="1400" b="1">
+              <a:rPr sz="1200" b="1">
                 <a:solidFill>
                   <a:srgbClr val="8B1A2B"/>
                 </a:solidFill>
                 <a:latin typeface="Microsoft YaHei"/>
                 <a:ea typeface="Microsoft YaHei"/>
               </a:rPr>
-              <a:t>闭环：需求到部署的 Agent 化…</a:t>
+              <a:t>更高研发效率 / 更好质量 / 更强组织能力</a:t>
             </a:r>
           </a:p>
         </p:txBody>
@@ -4449,8 +4483,8 @@
         </p:nvSpPr>
         <p:spPr>
           <a:xfrm>
-            <a:off x="8147304" y="4910328"/>
-            <a:ext cx="1847088" cy="868680"/>
+            <a:off x="8138156" y="4809744"/>
+            <a:ext cx="1874519" cy="960120"/>
           </a:xfrm>
           <a:prstGeom prst="rect">
             <a:avLst/>
@@ -4494,8 +4528,8 @@
         </p:nvSpPr>
         <p:spPr>
           <a:xfrm>
-            <a:off x="8257032" y="4965192"/>
-            <a:ext cx="1664208" cy="201168"/>
+            <a:off x="8229596" y="4864608"/>
+            <a:ext cx="1709927" cy="201168"/>
           </a:xfrm>
           <a:prstGeom prst="rect">
             <a:avLst/>
@@ -4517,7 +4551,7 @@
                 <a:latin typeface="Microsoft YaHei"/>
                 <a:ea typeface="Microsoft YaHei"/>
               </a:rPr>
-              <a:t>研发数字分身：云端与本…</a:t>
+              <a:t>闭环</a:t>
             </a:r>
           </a:p>
         </p:txBody>
@@ -4530,8 +4564,8 @@
         </p:nvSpPr>
         <p:spPr>
           <a:xfrm>
-            <a:off x="8257032" y="5166360"/>
-            <a:ext cx="1664208" cy="237744"/>
+            <a:off x="8229596" y="5065776"/>
+            <a:ext cx="1709927" cy="256032"/>
           </a:xfrm>
           <a:prstGeom prst="rect">
             <a:avLst/>
@@ -4553,7 +4587,7 @@
                 <a:latin typeface="Microsoft YaHei"/>
                 <a:ea typeface="Microsoft YaHei"/>
               </a:rPr>
-              <a:t>资产池：知识/记忆/技能/评测…</a:t>
+              <a:t>演讲口径</a:t>
             </a:r>
           </a:p>
         </p:txBody>
@@ -4566,8 +4600,8 @@
         </p:nvSpPr>
         <p:spPr>
           <a:xfrm>
-            <a:off x="8257032" y="5413248"/>
-            <a:ext cx="1664208" cy="292608"/>
+            <a:off x="8229596" y="5340096"/>
+            <a:ext cx="1709927" cy="365760"/>
           </a:xfrm>
           <a:prstGeom prst="rect">
             <a:avLst/>
@@ -4582,14 +4616,14 @@
           <a:p>
             <a:pPr algn="l"/>
             <a:r>
-              <a:rPr sz="1400" b="1">
+              <a:rPr sz="1200" b="1">
                 <a:solidFill>
                   <a:srgbClr val="8B1A2B"/>
                 </a:solidFill>
                 <a:latin typeface="Microsoft YaHei"/>
                 <a:ea typeface="Microsoft YaHei"/>
               </a:rPr>
-              <a:t>双运行时：Cloud Avatar…</a:t>
+              <a:t>需求到部署的 Agent 化流水线</a:t>
             </a:r>
           </a:p>
         </p:txBody>
@@ -4602,8 +4636,8 @@
         </p:nvSpPr>
         <p:spPr>
           <a:xfrm>
-            <a:off x="10104120" y="4910328"/>
-            <a:ext cx="1847088" cy="868680"/>
+            <a:off x="10104115" y="4809744"/>
+            <a:ext cx="1874519" cy="960120"/>
           </a:xfrm>
           <a:prstGeom prst="rect">
             <a:avLst/>
@@ -4647,8 +4681,8 @@
         </p:nvSpPr>
         <p:spPr>
           <a:xfrm>
-            <a:off x="10213848" y="4965192"/>
-            <a:ext cx="1664208" cy="201168"/>
+            <a:off x="10195555" y="4864608"/>
+            <a:ext cx="1709927" cy="201168"/>
           </a:xfrm>
           <a:prstGeom prst="rect">
             <a:avLst/>
@@ -4670,7 +4704,7 @@
                 <a:latin typeface="Microsoft YaHei"/>
                 <a:ea typeface="Microsoft YaHei"/>
               </a:rPr>
-              <a:t>工作台实践：数字分身驱…</a:t>
+              <a:t>双运行时</a:t>
             </a:r>
           </a:p>
         </p:txBody>
@@ -4683,8 +4717,8 @@
         </p:nvSpPr>
         <p:spPr>
           <a:xfrm>
-            <a:off x="10213848" y="5166360"/>
-            <a:ext cx="1664208" cy="237744"/>
+            <a:off x="10195555" y="5065776"/>
+            <a:ext cx="1709927" cy="256032"/>
           </a:xfrm>
           <a:prstGeom prst="rect">
             <a:avLst/>
@@ -4706,7 +4740,7 @@
                 <a:latin typeface="Microsoft YaHei"/>
                 <a:ea typeface="Microsoft YaHei"/>
               </a:rPr>
-              <a:t>演示流：数字分身 → 自动完成…</a:t>
+              <a:t>演讲口径</a:t>
             </a:r>
           </a:p>
         </p:txBody>
@@ -4719,8 +4753,8 @@
         </p:nvSpPr>
         <p:spPr>
           <a:xfrm>
-            <a:off x="10213848" y="5413248"/>
-            <a:ext cx="1664208" cy="292608"/>
+            <a:off x="10195555" y="5340096"/>
+            <a:ext cx="1709927" cy="365760"/>
           </a:xfrm>
           <a:prstGeom prst="rect">
             <a:avLst/>
@@ -4735,14 +4769,14 @@
           <a:p>
             <a:pPr algn="l"/>
             <a:r>
-              <a:rPr sz="1400" b="1">
+              <a:rPr sz="1200" b="1">
                 <a:solidFill>
                   <a:srgbClr val="8B1A2B"/>
                 </a:solidFill>
                 <a:latin typeface="Microsoft YaHei"/>
                 <a:ea typeface="Microsoft YaHei"/>
               </a:rPr>
-              <a:t>交互：任务计划可视化 + Agen…</a:t>
+              <a:t>Cloud Avatar Pod + Local Pilot</a:t>
             </a:r>
           </a:p>
         </p:txBody>
@@ -4755,8 +4789,8 @@
         </p:nvSpPr>
         <p:spPr>
           <a:xfrm>
-            <a:off x="0" y="5989320"/>
-            <a:ext cx="12191695" cy="868680"/>
+            <a:off x="0" y="5870448"/>
+            <a:ext cx="12191695" cy="987552"/>
           </a:xfrm>
           <a:prstGeom prst="rect">
             <a:avLst/>
@@ -4798,8 +4832,8 @@
         </p:nvSpPr>
         <p:spPr>
           <a:xfrm>
-            <a:off x="365760" y="6080760"/>
-            <a:ext cx="11430000" cy="256032"/>
+            <a:off x="320040" y="5943600"/>
+            <a:ext cx="11521440" cy="502920"/>
           </a:xfrm>
           <a:prstGeom prst="rect">
             <a:avLst/>
@@ -4814,14 +4848,14 @@
           <a:p>
             <a:pPr algn="l"/>
             <a:r>
-              <a:rPr sz="1200" b="1">
+              <a:rPr sz="1100" b="1">
                 <a:solidFill>
                   <a:srgbClr val="1A1A1A"/>
                 </a:solidFill>
                 <a:latin typeface="Microsoft YaHei"/>
                 <a:ea typeface="Microsoft YaHei"/>
               </a:rPr>
-              <a:t>可落地动作：数字分身平台 = Agent Sandbox 运行时 + 资产中台（知识/技能/MCP/记忆）+ 企业治理。；云端/本地双运行时与资产回流，是政企落地 AI4SE 的现实架构。</a:t>
+              <a:t>可落地动作：数字分身平台 = Agent Sandbox 运行时 + 资产中台（知识/技能/MCP/记忆）+ 企业治理；云端/本地双运行时与资产回流，是政企落地 AI4SE 的现实架构；人机职责分离（规划/审查/验证/决策）应写入产品与合规设计，匹配 HCS 专属云客户。</a:t>
             </a:r>
           </a:p>
         </p:txBody>
@@ -4834,8 +4868,8 @@
         </p:nvSpPr>
         <p:spPr>
           <a:xfrm>
-            <a:off x="365760" y="6373368"/>
-            <a:ext cx="11430000" cy="256032"/>
+            <a:off x="320040" y="6437376"/>
+            <a:ext cx="11521440" cy="256032"/>
           </a:xfrm>
           <a:prstGeom prst="rect">
             <a:avLst/>
@@ -4850,7 +4884,7 @@
           <a:p>
             <a:pPr algn="l"/>
             <a:r>
-              <a:rPr sz="1000" b="0">
+              <a:rPr sz="900" b="0">
                 <a:solidFill>
                   <a:srgbClr val="6B6B6B"/>
                 </a:solidFill>
@@ -5092,7 +5126,7 @@
         <p:spPr>
           <a:xfrm>
             <a:off x="429768" y="1143000"/>
-            <a:ext cx="3496970" cy="292608"/>
+            <a:ext cx="3496970" cy="384048"/>
           </a:xfrm>
           <a:prstGeom prst="rect">
             <a:avLst/>
@@ -5114,7 +5148,7 @@
                 <a:latin typeface="Microsoft YaHei"/>
                 <a:ea typeface="Microsoft YaHei"/>
               </a:rPr>
-              <a:t>产品定位：云端 Agent 平台 …</a:t>
+              <a:t>产品定位：云端 Agent 平台 / Agent Sandbox</a:t>
             </a:r>
           </a:p>
         </p:txBody>
@@ -5135,7 +5169,7 @@
         </p:blipFill>
         <p:spPr>
           <a:xfrm>
-            <a:off x="429768" y="1928092"/>
+            <a:off x="429768" y="1946380"/>
             <a:ext cx="3496970" cy="2965239"/>
           </a:xfrm>
           <a:prstGeom prst="rect">
@@ -5174,7 +5208,7 @@
                 <a:latin typeface="Microsoft YaHei"/>
                 <a:ea typeface="Microsoft YaHei"/>
               </a:rPr>
-              <a:t>朗新 AI 时代生产力：Agent Sandbox 云…</a:t>
+              <a:t>朗新 AI 时代生产力：Agent Sandbox 云端平台定位</a:t>
             </a:r>
           </a:p>
         </p:txBody>
@@ -5233,7 +5267,7 @@
         <p:spPr>
           <a:xfrm>
             <a:off x="4347362" y="1143000"/>
-            <a:ext cx="3496970" cy="292608"/>
+            <a:ext cx="3496970" cy="384048"/>
           </a:xfrm>
           <a:prstGeom prst="rect">
             <a:avLst/>
@@ -5255,7 +5289,7 @@
                 <a:latin typeface="Microsoft YaHei"/>
                 <a:ea typeface="Microsoft YaHei"/>
               </a:rPr>
-              <a:t>人的四职责：规划 / 审查 / 验…</a:t>
+              <a:t>人的四职责：规划 / 审查 / 验证 / 决策</a:t>
             </a:r>
           </a:p>
         </p:txBody>
@@ -5276,7 +5310,7 @@
         </p:blipFill>
         <p:spPr>
           <a:xfrm>
-            <a:off x="4347362" y="1928092"/>
+            <a:off x="4347362" y="1946380"/>
             <a:ext cx="3496970" cy="2965239"/>
           </a:xfrm>
           <a:prstGeom prst="rect">
@@ -5374,7 +5408,7 @@
         <p:spPr>
           <a:xfrm>
             <a:off x="8264956" y="1143000"/>
-            <a:ext cx="3496970" cy="292608"/>
+            <a:ext cx="3496970" cy="384048"/>
           </a:xfrm>
           <a:prstGeom prst="rect">
             <a:avLst/>
@@ -5396,7 +5430,7 @@
                 <a:latin typeface="Microsoft YaHei"/>
                 <a:ea typeface="Microsoft YaHei"/>
               </a:rPr>
-              <a:t>目标：更高研发效率 / 更好质量 …</a:t>
+              <a:t>资产四件套：Knowledge / Skill / MCP / Memory · 目标：更高研发效率 / 更好质量 / 更强组织能力</a:t>
             </a:r>
           </a:p>
         </p:txBody>
@@ -5417,7 +5451,7 @@
         </p:blipFill>
         <p:spPr>
           <a:xfrm>
-            <a:off x="8264956" y="1928092"/>
+            <a:off x="8264956" y="1946380"/>
             <a:ext cx="3496970" cy="2965239"/>
           </a:xfrm>
           <a:prstGeom prst="rect">
@@ -5456,7 +5490,7 @@
                 <a:latin typeface="Microsoft YaHei"/>
                 <a:ea typeface="Microsoft YaHei"/>
               </a:rPr>
-              <a:t>九功数字分身技术架构：Sandbox → 执行层 → …</a:t>
+              <a:t>九功数字分身技术架构：Sandbox → 执行层 → 企业应用</a:t>
             </a:r>
           </a:p>
         </p:txBody>

--- a/yunqi-2026-agenda-201/docs/洞察一页-10-朗新：基于 Agent Sandbox 的云端 Agen.pptx
+++ b/yunqi-2026-agenda-201/docs/洞察一页-10-朗新：基于 Agent Sandbox 的云端 Agen.pptx
@@ -3323,7 +3323,7 @@
                 <a:latin typeface="Microsoft YaHei"/>
                 <a:ea typeface="Microsoft YaHei"/>
               </a:rPr>
-              <a:t>一句话判断：张栋介绍朗新「九功数字分身」云端 Agent 平台：以 Agent Sandbox 为算力运行时，向上构建分身资产层（知识/技能/MCP/记忆）与执行层，并服务研发/运维/运营/业务等企业分身。</a:t>
+              <a:t>一句话判断：朗新 Agent Sandbox——以 Agent Sandbox 为算力运行时，向上构建分身资产层（知识/技能/MCP/记忆）与执行层，并服务研发/运维/运营/业务等企业分身。</a:t>
             </a:r>
           </a:p>
         </p:txBody>
@@ -3444,7 +3444,7 @@
                 <a:latin typeface="Microsoft YaHei"/>
                 <a:ea typeface="Microsoft YaHei"/>
               </a:rPr>
-              <a:t>HCS 可将「行业客户基于栈内 Agent Sandbox 构建数字分身平台」作为标杆场景，输出可复制的 AI4SE/企业分身参考架构</a:t>
+              <a:t>可将「行业客户基于栈内 Agent Sandbox 构建数字分身平台」作为标杆场景，输出可复制的 AI4SE/企业分身参考架构</a:t>
             </a:r>
           </a:p>
           <a:p>
@@ -3599,7 +3599,7 @@
                 <a:latin typeface="Microsoft YaHei"/>
                 <a:ea typeface="Microsoft YaHei"/>
               </a:rPr>
-              <a:t>平台设计要从「人用工具」升级为「人监督分身」：HCS Agent 平台需内建审批、审计、结果验证与职责分离，匹配企业治理，而不是无限自治。</a:t>
+              <a:t>平台设计要从「人用工具」升级为「人监督分身」： Agent 平台需内建审批、审计、结果验证与职责分离，匹配企业治理，而不是无限自治。</a:t>
             </a:r>
           </a:p>
           <a:p>
@@ -3939,7 +3939,7 @@
                 <a:latin typeface="Microsoft YaHei"/>
                 <a:ea typeface="Microsoft YaHei"/>
               </a:rPr>
-              <a:t>产品定位</a:t>
+              <a:t>数字分身的 Agent Sandbox 运行实践</a:t>
             </a:r>
           </a:p>
         </p:txBody>
@@ -3975,7 +3975,7 @@
                 <a:latin typeface="Microsoft YaHei"/>
                 <a:ea typeface="Microsoft YaHei"/>
               </a:rPr>
-              <a:t>演讲口径</a:t>
+              <a:t>关键能力</a:t>
             </a:r>
           </a:p>
         </p:txBody>
@@ -4011,7 +4011,7 @@
                 <a:latin typeface="Microsoft YaHei"/>
                 <a:ea typeface="Microsoft YaHei"/>
               </a:rPr>
-              <a:t>云端 Agent 平台 / Agent Sandbox</a:t>
+              <a:t>100+ 常驻分身</a:t>
             </a:r>
           </a:p>
         </p:txBody>
@@ -4092,7 +4092,7 @@
                 <a:latin typeface="Microsoft YaHei"/>
                 <a:ea typeface="Microsoft YaHei"/>
               </a:rPr>
-              <a:t>人的四职责</a:t>
+              <a:t>数字分身的 Agent Sandbox 运行实践</a:t>
             </a:r>
           </a:p>
         </p:txBody>
@@ -4128,7 +4128,7 @@
                 <a:latin typeface="Microsoft YaHei"/>
                 <a:ea typeface="Microsoft YaHei"/>
               </a:rPr>
-              <a:t>演讲口径</a:t>
+              <a:t>关键能力</a:t>
             </a:r>
           </a:p>
         </p:txBody>
@@ -4164,7 +4164,7 @@
                 <a:latin typeface="Microsoft YaHei"/>
                 <a:ea typeface="Microsoft YaHei"/>
               </a:rPr>
-              <a:t>规划 / 审查 / 验证 / 决策</a:t>
+              <a:t>200+ 动态拉起/销毁</a:t>
             </a:r>
           </a:p>
         </p:txBody>
@@ -4245,7 +4245,7 @@
                 <a:latin typeface="Microsoft YaHei"/>
                 <a:ea typeface="Microsoft YaHei"/>
               </a:rPr>
-              <a:t>资产四件套</a:t>
+              <a:t>闭环</a:t>
             </a:r>
           </a:p>
         </p:txBody>
@@ -4281,7 +4281,7 @@
                 <a:latin typeface="Microsoft YaHei"/>
                 <a:ea typeface="Microsoft YaHei"/>
               </a:rPr>
-              <a:t>演讲口径</a:t>
+              <a:t>云端开发</a:t>
             </a:r>
           </a:p>
         </p:txBody>
@@ -4317,7 +4317,7 @@
                 <a:latin typeface="Microsoft YaHei"/>
                 <a:ea typeface="Microsoft YaHei"/>
               </a:rPr>
-              <a:t>Knowledge / Skill / MCP / Memory</a:t>
+              <a:t>需求到部署的 Agent 化流水线</a:t>
             </a:r>
           </a:p>
         </p:txBody>
@@ -4398,7 +4398,7 @@
                 <a:latin typeface="Microsoft YaHei"/>
                 <a:ea typeface="Microsoft YaHei"/>
               </a:rPr>
-              <a:t>目标</a:t>
+              <a:t>数字分身的 Agent Sandbox 运行实践</a:t>
             </a:r>
           </a:p>
         </p:txBody>
@@ -4434,7 +4434,7 @@
                 <a:latin typeface="Microsoft YaHei"/>
                 <a:ea typeface="Microsoft YaHei"/>
               </a:rPr>
-              <a:t>演讲口径</a:t>
+              <a:t>关键能力</a:t>
             </a:r>
           </a:p>
         </p:txBody>
@@ -4470,7 +4470,7 @@
                 <a:latin typeface="Microsoft YaHei"/>
                 <a:ea typeface="Microsoft YaHei"/>
               </a:rPr>
-              <a:t>更高研发效率 / 更好质量 / 更强组织能力</a:t>
+              <a:t>50+ CPU 使用；200G+ 内存使用</a:t>
             </a:r>
           </a:p>
         </p:txBody>
@@ -4551,7 +4551,7 @@
                 <a:latin typeface="Microsoft YaHei"/>
                 <a:ea typeface="Microsoft YaHei"/>
               </a:rPr>
-              <a:t>闭环</a:t>
+              <a:t>交互</a:t>
             </a:r>
           </a:p>
         </p:txBody>
@@ -4587,7 +4587,7 @@
                 <a:latin typeface="Microsoft YaHei"/>
                 <a:ea typeface="Microsoft YaHei"/>
               </a:rPr>
-              <a:t>演讲口径</a:t>
+              <a:t>数字分身驱动需求开发</a:t>
             </a:r>
           </a:p>
         </p:txBody>
@@ -4623,7 +4623,7 @@
                 <a:latin typeface="Microsoft YaHei"/>
                 <a:ea typeface="Microsoft YaHei"/>
               </a:rPr>
-              <a:t>需求到部署的 Agent 化流水线</a:t>
+              <a:t>任务计划可视化 + Agent 工作区</a:t>
             </a:r>
           </a:p>
         </p:txBody>
@@ -4704,7 +4704,7 @@
                 <a:latin typeface="Microsoft YaHei"/>
                 <a:ea typeface="Microsoft YaHei"/>
               </a:rPr>
-              <a:t>双运行时</a:t>
+              <a:t>人的四职责</a:t>
             </a:r>
           </a:p>
         </p:txBody>
@@ -4740,7 +4740,7 @@
                 <a:latin typeface="Microsoft YaHei"/>
                 <a:ea typeface="Microsoft YaHei"/>
               </a:rPr>
-              <a:t>演讲口径</a:t>
+              <a:t>重构 AI 时代生产关系</a:t>
             </a:r>
           </a:p>
         </p:txBody>
@@ -4776,7 +4776,7 @@
                 <a:latin typeface="Microsoft YaHei"/>
                 <a:ea typeface="Microsoft YaHei"/>
               </a:rPr>
-              <a:t>Cloud Avatar Pod + Local Pilot</a:t>
+              <a:t>规划 / 审查 / 验证 / 决策</a:t>
             </a:r>
           </a:p>
         </p:txBody>
@@ -4855,7 +4855,7 @@
                 <a:latin typeface="Microsoft YaHei"/>
                 <a:ea typeface="Microsoft YaHei"/>
               </a:rPr>
-              <a:t>可落地动作：数字分身平台 = Agent Sandbox 运行时 + 资产中台（知识/技能/MCP/记忆）+ 企业治理；云端/本地双运行时与资产回流，是政企落地 AI4SE 的现实架构；人机职责分离（规划/审查/验证/决策）应写入产品与合规设计，匹配 HCS 专属云客户。</a:t>
+              <a:t>启示要点：数字分身平台 = Agent Sandbox 运行时 + 资产中台（知识/技能/MCP/记忆）+ 企业治理；云端/本地双运行时与资产回流，是政企落地 AI4SE 的现实架构；人机职责分离（规划/审查/验证/决策）应写入产品与合规设计，匹配 专属云客户。</a:t>
             </a:r>
           </a:p>
         </p:txBody>
@@ -4891,7 +4891,7 @@
                 <a:latin typeface="Microsoft YaHei"/>
                 <a:ea typeface="Microsoft YaHei"/>
               </a:rPr>
-              <a:t>来源：https://yunqi.aliyun.com/2026/session?agendaId=201 · Talk 10 张栋  ·  视角：HCS 技术规划</a:t>
+              <a:t>来源：https://yunqi.aliyun.com/2026/session?agendaId=201 · Talk 10 张栋</a:t>
             </a:r>
           </a:p>
         </p:txBody>
